--- a/slides/Chapter 01 - Introduction to Texas (Lecture Deck).pptx
+++ b/slides/Chapter 01 - Introduction to Texas (Lecture Deck).pptx
@@ -2784,8 +2784,8 @@
         </p:nvSpPr>
         <p:spPr>
           <a:xfrm>
-            <a:off x="11140135" y="6291072"/>
-            <a:ext cx="457200" cy="274320"/>
+            <a:off x="11140135" y="6492240"/>
+            <a:ext cx="457200" cy="237744"/>
           </a:xfrm>
           <a:prstGeom prst="rect">
             <a:avLst/>
@@ -2899,7 +2899,7 @@
           <a:ln/>
         </p:spPr>
         <p:txBody>
-          <a:bodyPr wrap="square" lIns="0" tIns="0" rIns="0" bIns="0" rtlCol="0" anchor="ctr"/>
+          <a:bodyPr wrap="square" lIns="0" tIns="0" rIns="0" bIns="0" rtlCol="0" anchor="t"/>
           <a:lstStyle/>
           <a:p>
             <a:pPr indent="0" marL="0">
@@ -3061,7 +3061,7 @@
           <a:ln/>
         </p:spPr>
         <p:txBody>
-          <a:bodyPr wrap="square" lIns="0" tIns="0" rIns="0" bIns="0" rtlCol="0" anchor="ctr"/>
+          <a:bodyPr wrap="square" lIns="0" tIns="0" rIns="0" bIns="0" rtlCol="0" anchor="t"/>
           <a:lstStyle/>
           <a:p>
             <a:pPr indent="0" marL="0">
@@ -3200,8 +3200,8 @@
         </p:nvSpPr>
         <p:spPr>
           <a:xfrm>
-            <a:off x="11140135" y="6291072"/>
-            <a:ext cx="457200" cy="274320"/>
+            <a:off x="11140135" y="6492240"/>
+            <a:ext cx="457200" cy="237744"/>
           </a:xfrm>
           <a:prstGeom prst="rect">
             <a:avLst/>
@@ -3332,7 +3332,7 @@
           <a:ln/>
         </p:spPr>
         <p:txBody>
-          <a:bodyPr wrap="square" lIns="0" tIns="0" rIns="0" bIns="0" rtlCol="0" anchor="ctr"/>
+          <a:bodyPr wrap="square" lIns="0" tIns="0" rIns="0" bIns="0" rtlCol="0" anchor="t"/>
           <a:lstStyle/>
           <a:p>
             <a:pPr indent="0" marL="0">
@@ -3371,7 +3371,7 @@
           <a:ln/>
         </p:spPr>
         <p:txBody>
-          <a:bodyPr wrap="square" lIns="0" tIns="0" rIns="0" bIns="0" rtlCol="0" anchor="ctr"/>
+          <a:bodyPr wrap="square" lIns="0" tIns="0" rIns="0" bIns="0" rtlCol="0" anchor="t"/>
           <a:lstStyle/>
           <a:p>
             <a:pPr indent="0" marL="0">
@@ -3472,7 +3472,7 @@
           <a:ln/>
         </p:spPr>
         <p:txBody>
-          <a:bodyPr wrap="square" lIns="0" tIns="0" rIns="0" bIns="0" rtlCol="0" anchor="ctr"/>
+          <a:bodyPr wrap="square" lIns="0" tIns="0" rIns="0" bIns="0" rtlCol="0" anchor="t"/>
           <a:lstStyle/>
           <a:p>
             <a:pPr indent="0" marL="0">
@@ -3511,7 +3511,7 @@
           <a:ln/>
         </p:spPr>
         <p:txBody>
-          <a:bodyPr wrap="square" lIns="0" tIns="0" rIns="0" bIns="0" rtlCol="0" anchor="ctr"/>
+          <a:bodyPr wrap="square" lIns="0" tIns="0" rIns="0" bIns="0" rtlCol="0" anchor="t"/>
           <a:lstStyle/>
           <a:p>
             <a:pPr indent="0" marL="0">
@@ -3612,7 +3612,7 @@
           <a:ln/>
         </p:spPr>
         <p:txBody>
-          <a:bodyPr wrap="square" lIns="0" tIns="0" rIns="0" bIns="0" rtlCol="0" anchor="ctr"/>
+          <a:bodyPr wrap="square" lIns="0" tIns="0" rIns="0" bIns="0" rtlCol="0" anchor="t"/>
           <a:lstStyle/>
           <a:p>
             <a:pPr indent="0" marL="0">
@@ -3651,7 +3651,7 @@
           <a:ln/>
         </p:spPr>
         <p:txBody>
-          <a:bodyPr wrap="square" lIns="0" tIns="0" rIns="0" bIns="0" rtlCol="0" anchor="ctr"/>
+          <a:bodyPr wrap="square" lIns="0" tIns="0" rIns="0" bIns="0" rtlCol="0" anchor="t"/>
           <a:lstStyle/>
           <a:p>
             <a:pPr indent="0" marL="0">
@@ -3901,8 +3901,8 @@
         </p:nvSpPr>
         <p:spPr>
           <a:xfrm>
-            <a:off x="11140135" y="6291072"/>
-            <a:ext cx="457200" cy="274320"/>
+            <a:off x="11140135" y="6492240"/>
+            <a:ext cx="457200" cy="237744"/>
           </a:xfrm>
           <a:prstGeom prst="rect">
             <a:avLst/>
@@ -3950,7 +3950,7 @@
           <a:ln/>
         </p:spPr>
         <p:txBody>
-          <a:bodyPr wrap="square" lIns="0" tIns="0" rIns="0" bIns="0" rtlCol="0" anchor="ctr"/>
+          <a:bodyPr wrap="square" lIns="0" tIns="0" rIns="0" bIns="0" rtlCol="0" anchor="t"/>
           <a:lstStyle/>
           <a:p>
             <a:pPr indent="0" marL="0">
@@ -4041,7 +4041,7 @@
           <a:ln/>
         </p:spPr>
         <p:txBody>
-          <a:bodyPr wrap="square" lIns="0" tIns="0" rIns="0" bIns="0" rtlCol="0" anchor="ctr"/>
+          <a:bodyPr wrap="square" lIns="0" tIns="0" rIns="0" bIns="0" rtlCol="0" anchor="t"/>
           <a:lstStyle/>
           <a:p>
             <a:pPr indent="0" marL="0">
@@ -4080,7 +4080,7 @@
           <a:ln/>
         </p:spPr>
         <p:txBody>
-          <a:bodyPr wrap="square" lIns="0" tIns="0" rIns="0" bIns="0" rtlCol="0" anchor="ctr"/>
+          <a:bodyPr wrap="square" lIns="0" tIns="0" rIns="0" bIns="0" rtlCol="0" anchor="t"/>
           <a:lstStyle/>
           <a:p>
             <a:pPr indent="0" marL="0">
@@ -4119,7 +4119,7 @@
           <a:ln/>
         </p:spPr>
         <p:txBody>
-          <a:bodyPr wrap="square" lIns="0" tIns="0" rIns="0" bIns="0" rtlCol="0" anchor="ctr"/>
+          <a:bodyPr wrap="square" lIns="0" tIns="0" rIns="0" bIns="0" rtlCol="0" anchor="t"/>
           <a:lstStyle/>
           <a:p>
             <a:pPr indent="0" marL="0">
@@ -4210,7 +4210,7 @@
           <a:ln/>
         </p:spPr>
         <p:txBody>
-          <a:bodyPr wrap="square" lIns="0" tIns="0" rIns="0" bIns="0" rtlCol="0" anchor="ctr"/>
+          <a:bodyPr wrap="square" lIns="0" tIns="0" rIns="0" bIns="0" rtlCol="0" anchor="t"/>
           <a:lstStyle/>
           <a:p>
             <a:pPr indent="0" marL="0">
@@ -4249,7 +4249,7 @@
           <a:ln/>
         </p:spPr>
         <p:txBody>
-          <a:bodyPr wrap="square" lIns="0" tIns="0" rIns="0" bIns="0" rtlCol="0" anchor="ctr"/>
+          <a:bodyPr wrap="square" lIns="0" tIns="0" rIns="0" bIns="0" rtlCol="0" anchor="t"/>
           <a:lstStyle/>
           <a:p>
             <a:pPr indent="0" marL="0">
@@ -4288,7 +4288,7 @@
           <a:ln/>
         </p:spPr>
         <p:txBody>
-          <a:bodyPr wrap="square" lIns="0" tIns="0" rIns="0" bIns="0" rtlCol="0" anchor="ctr"/>
+          <a:bodyPr wrap="square" lIns="0" tIns="0" rIns="0" bIns="0" rtlCol="0" anchor="t"/>
           <a:lstStyle/>
           <a:p>
             <a:pPr indent="0" marL="0">
@@ -4379,7 +4379,7 @@
           <a:ln/>
         </p:spPr>
         <p:txBody>
-          <a:bodyPr wrap="square" lIns="0" tIns="0" rIns="0" bIns="0" rtlCol="0" anchor="ctr"/>
+          <a:bodyPr wrap="square" lIns="0" tIns="0" rIns="0" bIns="0" rtlCol="0" anchor="t"/>
           <a:lstStyle/>
           <a:p>
             <a:pPr indent="0" marL="0">
@@ -4418,7 +4418,7 @@
           <a:ln/>
         </p:spPr>
         <p:txBody>
-          <a:bodyPr wrap="square" lIns="0" tIns="0" rIns="0" bIns="0" rtlCol="0" anchor="ctr"/>
+          <a:bodyPr wrap="square" lIns="0" tIns="0" rIns="0" bIns="0" rtlCol="0" anchor="t"/>
           <a:lstStyle/>
           <a:p>
             <a:pPr indent="0" marL="0">
@@ -4457,7 +4457,7 @@
           <a:ln/>
         </p:spPr>
         <p:txBody>
-          <a:bodyPr wrap="square" lIns="0" tIns="0" rIns="0" bIns="0" rtlCol="0" anchor="ctr"/>
+          <a:bodyPr wrap="square" lIns="0" tIns="0" rIns="0" bIns="0" rtlCol="0" anchor="t"/>
           <a:lstStyle/>
           <a:p>
             <a:pPr indent="0" marL="0">
@@ -4499,7 +4499,7 @@
           <a:ln/>
         </p:spPr>
         <p:txBody>
-          <a:bodyPr wrap="square" lIns="0" tIns="0" rIns="0" bIns="0" rtlCol="0" anchor="ctr"/>
+          <a:bodyPr wrap="square" lIns="0" tIns="0" rIns="0" bIns="0" rtlCol="0" anchor="t"/>
           <a:lstStyle/>
           <a:p>
             <a:pPr indent="0" marL="0">
@@ -4941,8 +4941,8 @@
         </p:nvSpPr>
         <p:spPr>
           <a:xfrm>
-            <a:off x="11140135" y="6291072"/>
-            <a:ext cx="457200" cy="274320"/>
+            <a:off x="11140135" y="6492240"/>
+            <a:ext cx="457200" cy="237744"/>
           </a:xfrm>
           <a:prstGeom prst="rect">
             <a:avLst/>
@@ -5090,8 +5090,8 @@
         </p:nvSpPr>
         <p:spPr>
           <a:xfrm>
-            <a:off x="11140135" y="6291072"/>
-            <a:ext cx="457200" cy="274320"/>
+            <a:off x="11140135" y="6492240"/>
+            <a:ext cx="457200" cy="237744"/>
           </a:xfrm>
           <a:prstGeom prst="rect">
             <a:avLst/>
@@ -5807,7 +5807,7 @@
           <a:ln/>
         </p:spPr>
         <p:txBody>
-          <a:bodyPr wrap="square" lIns="0" tIns="0" rIns="0" bIns="0" rtlCol="0" anchor="ctr"/>
+          <a:bodyPr wrap="square" lIns="0" tIns="0" rIns="0" bIns="0" rtlCol="0" anchor="t"/>
           <a:lstStyle/>
           <a:p>
             <a:pPr indent="0" marL="0">
@@ -5946,8 +5946,8 @@
         </p:nvSpPr>
         <p:spPr>
           <a:xfrm>
-            <a:off x="11140135" y="6291072"/>
-            <a:ext cx="457200" cy="274320"/>
+            <a:off x="11140135" y="6492240"/>
+            <a:ext cx="457200" cy="237744"/>
           </a:xfrm>
           <a:prstGeom prst="rect">
             <a:avLst/>
@@ -6081,7 +6081,7 @@
           <a:ln/>
         </p:spPr>
         <p:txBody>
-          <a:bodyPr wrap="square" lIns="0" tIns="0" rIns="0" bIns="0" rtlCol="0" anchor="ctr"/>
+          <a:bodyPr wrap="square" lIns="0" tIns="0" rIns="0" bIns="0" rtlCol="0" anchor="t"/>
           <a:lstStyle/>
           <a:p>
             <a:pPr indent="0" marL="0">
@@ -6123,7 +6123,7 @@
           <a:ln/>
         </p:spPr>
         <p:txBody>
-          <a:bodyPr wrap="square" lIns="0" tIns="0" rIns="0" bIns="0" rtlCol="0" anchor="ctr"/>
+          <a:bodyPr wrap="square" lIns="0" tIns="0" rIns="0" bIns="0" rtlCol="0" anchor="t"/>
           <a:lstStyle/>
           <a:p>
             <a:pPr indent="0" marL="0">
@@ -6251,7 +6251,7 @@
           <a:ln/>
         </p:spPr>
         <p:txBody>
-          <a:bodyPr wrap="square" lIns="0" tIns="0" rIns="0" bIns="0" rtlCol="0" anchor="ctr"/>
+          <a:bodyPr wrap="square" lIns="0" tIns="0" rIns="0" bIns="0" rtlCol="0" anchor="t"/>
           <a:lstStyle/>
           <a:p>
             <a:pPr indent="0" marL="0">
@@ -6293,7 +6293,7 @@
           <a:ln/>
         </p:spPr>
         <p:txBody>
-          <a:bodyPr wrap="square" lIns="0" tIns="0" rIns="0" bIns="0" rtlCol="0" anchor="ctr"/>
+          <a:bodyPr wrap="square" lIns="0" tIns="0" rIns="0" bIns="0" rtlCol="0" anchor="t"/>
           <a:lstStyle/>
           <a:p>
             <a:pPr indent="0" marL="0">
@@ -6421,7 +6421,7 @@
           <a:ln/>
         </p:spPr>
         <p:txBody>
-          <a:bodyPr wrap="square" lIns="0" tIns="0" rIns="0" bIns="0" rtlCol="0" anchor="ctr"/>
+          <a:bodyPr wrap="square" lIns="0" tIns="0" rIns="0" bIns="0" rtlCol="0" anchor="t"/>
           <a:lstStyle/>
           <a:p>
             <a:pPr indent="0" marL="0">
@@ -6463,7 +6463,7 @@
           <a:ln/>
         </p:spPr>
         <p:txBody>
-          <a:bodyPr wrap="square" lIns="0" tIns="0" rIns="0" bIns="0" rtlCol="0" anchor="ctr"/>
+          <a:bodyPr wrap="square" lIns="0" tIns="0" rIns="0" bIns="0" rtlCol="0" anchor="t"/>
           <a:lstStyle/>
           <a:p>
             <a:pPr indent="0" marL="0">
@@ -6713,8 +6713,8 @@
         </p:nvSpPr>
         <p:spPr>
           <a:xfrm>
-            <a:off x="11140135" y="6291072"/>
-            <a:ext cx="457200" cy="274320"/>
+            <a:off x="11140135" y="6492240"/>
+            <a:ext cx="457200" cy="237744"/>
           </a:xfrm>
           <a:prstGeom prst="rect">
             <a:avLst/>
@@ -6762,7 +6762,7 @@
           <a:ln/>
         </p:spPr>
         <p:txBody>
-          <a:bodyPr wrap="square" lIns="0" tIns="0" rIns="0" bIns="0" rtlCol="0" anchor="ctr"/>
+          <a:bodyPr wrap="square" lIns="0" tIns="0" rIns="0" bIns="0" rtlCol="0" anchor="t"/>
           <a:lstStyle/>
           <a:p>
             <a:pPr indent="0" marL="0">
@@ -6801,7 +6801,7 @@
           <a:ln/>
         </p:spPr>
         <p:txBody>
-          <a:bodyPr wrap="square" lIns="0" tIns="0" rIns="0" bIns="0" rtlCol="0" anchor="ctr"/>
+          <a:bodyPr wrap="square" lIns="0" tIns="0" rIns="0" bIns="0" rtlCol="0" anchor="t"/>
           <a:lstStyle/>
           <a:p>
             <a:pPr indent="0" marL="0">
@@ -6843,7 +6843,7 @@
           <a:ln/>
         </p:spPr>
         <p:txBody>
-          <a:bodyPr wrap="square" lIns="0" tIns="0" rIns="0" bIns="0" rtlCol="0" anchor="ctr"/>
+          <a:bodyPr wrap="square" lIns="0" tIns="0" rIns="0" bIns="0" rtlCol="0" anchor="t"/>
           <a:lstStyle/>
           <a:p>
             <a:pPr indent="0" marL="0">
@@ -6882,7 +6882,7 @@
           <a:ln/>
         </p:spPr>
         <p:txBody>
-          <a:bodyPr wrap="square" lIns="0" tIns="0" rIns="0" bIns="0" rtlCol="0" anchor="ctr"/>
+          <a:bodyPr wrap="square" lIns="0" tIns="0" rIns="0" bIns="0" rtlCol="0" anchor="t"/>
           <a:lstStyle/>
           <a:p>
             <a:pPr indent="0" marL="0">
@@ -6924,7 +6924,7 @@
           <a:ln/>
         </p:spPr>
         <p:txBody>
-          <a:bodyPr wrap="square" lIns="0" tIns="0" rIns="0" bIns="0" rtlCol="0" anchor="ctr"/>
+          <a:bodyPr wrap="square" lIns="0" tIns="0" rIns="0" bIns="0" rtlCol="0" anchor="t"/>
           <a:lstStyle/>
           <a:p>
             <a:pPr indent="0" marL="0">
@@ -6963,7 +6963,7 @@
           <a:ln/>
         </p:spPr>
         <p:txBody>
-          <a:bodyPr wrap="square" lIns="0" tIns="0" rIns="0" bIns="0" rtlCol="0" anchor="ctr"/>
+          <a:bodyPr wrap="square" lIns="0" tIns="0" rIns="0" bIns="0" rtlCol="0" anchor="t"/>
           <a:lstStyle/>
           <a:p>
             <a:pPr indent="0" marL="0">
@@ -7005,7 +7005,7 @@
           <a:ln/>
         </p:spPr>
         <p:txBody>
-          <a:bodyPr wrap="square" lIns="0" tIns="0" rIns="0" bIns="0" rtlCol="0" anchor="ctr"/>
+          <a:bodyPr wrap="square" lIns="0" tIns="0" rIns="0" bIns="0" rtlCol="0" anchor="t"/>
           <a:lstStyle/>
           <a:p>
             <a:pPr indent="0" marL="0">
@@ -7044,7 +7044,7 @@
           <a:ln/>
         </p:spPr>
         <p:txBody>
-          <a:bodyPr wrap="square" lIns="0" tIns="0" rIns="0" bIns="0" rtlCol="0" anchor="ctr"/>
+          <a:bodyPr wrap="square" lIns="0" tIns="0" rIns="0" bIns="0" rtlCol="0" anchor="t"/>
           <a:lstStyle/>
           <a:p>
             <a:pPr indent="0" marL="0">
@@ -7086,7 +7086,7 @@
           <a:ln/>
         </p:spPr>
         <p:txBody>
-          <a:bodyPr wrap="square" lIns="0" tIns="0" rIns="0" bIns="0" rtlCol="0" anchor="ctr"/>
+          <a:bodyPr wrap="square" lIns="0" tIns="0" rIns="0" bIns="0" rtlCol="0" anchor="t"/>
           <a:lstStyle/>
           <a:p>
             <a:pPr indent="0" marL="0">
@@ -7125,7 +7125,7 @@
           <a:ln/>
         </p:spPr>
         <p:txBody>
-          <a:bodyPr wrap="square" lIns="0" tIns="0" rIns="0" bIns="0" rtlCol="0" anchor="ctr"/>
+          <a:bodyPr wrap="square" lIns="0" tIns="0" rIns="0" bIns="0" rtlCol="0" anchor="t"/>
           <a:lstStyle/>
           <a:p>
             <a:pPr indent="0" marL="0">
@@ -7167,7 +7167,7 @@
           <a:ln/>
         </p:spPr>
         <p:txBody>
-          <a:bodyPr wrap="square" lIns="0" tIns="0" rIns="0" bIns="0" rtlCol="0" anchor="ctr"/>
+          <a:bodyPr wrap="square" lIns="0" tIns="0" rIns="0" bIns="0" rtlCol="0" anchor="t"/>
           <a:lstStyle/>
           <a:p>
             <a:pPr indent="0" marL="0">
@@ -7206,7 +7206,7 @@
           <a:ln/>
         </p:spPr>
         <p:txBody>
-          <a:bodyPr wrap="square" lIns="0" tIns="0" rIns="0" bIns="0" rtlCol="0" anchor="ctr"/>
+          <a:bodyPr wrap="square" lIns="0" tIns="0" rIns="0" bIns="0" rtlCol="0" anchor="t"/>
           <a:lstStyle/>
           <a:p>
             <a:pPr indent="0" marL="0">
@@ -7248,7 +7248,7 @@
           <a:ln/>
         </p:spPr>
         <p:txBody>
-          <a:bodyPr wrap="square" lIns="0" tIns="0" rIns="0" bIns="0" rtlCol="0" anchor="ctr"/>
+          <a:bodyPr wrap="square" lIns="0" tIns="0" rIns="0" bIns="0" rtlCol="0" anchor="t"/>
           <a:lstStyle/>
           <a:p>
             <a:pPr indent="0" marL="0">
@@ -7562,8 +7562,8 @@
         </p:nvSpPr>
         <p:spPr>
           <a:xfrm>
-            <a:off x="11140135" y="6291072"/>
-            <a:ext cx="457200" cy="274320"/>
+            <a:off x="11140135" y="6492240"/>
+            <a:ext cx="457200" cy="237744"/>
           </a:xfrm>
           <a:prstGeom prst="rect">
             <a:avLst/>
@@ -8271,8 +8271,8 @@
         </p:nvSpPr>
         <p:spPr>
           <a:xfrm>
-            <a:off x="11140135" y="6291072"/>
-            <a:ext cx="457200" cy="274320"/>
+            <a:off x="11140135" y="6492240"/>
+            <a:ext cx="457200" cy="237744"/>
           </a:xfrm>
           <a:prstGeom prst="rect">
             <a:avLst/>
@@ -9010,8 +9010,8 @@
         </p:nvSpPr>
         <p:spPr>
           <a:xfrm>
-            <a:off x="11140135" y="6291072"/>
-            <a:ext cx="457200" cy="274320"/>
+            <a:off x="11140135" y="6492240"/>
+            <a:ext cx="457200" cy="237744"/>
           </a:xfrm>
           <a:prstGeom prst="rect">
             <a:avLst/>
@@ -9125,7 +9125,7 @@
           <a:ln/>
         </p:spPr>
         <p:txBody>
-          <a:bodyPr wrap="square" lIns="0" tIns="0" rIns="0" bIns="0" rtlCol="0" anchor="ctr"/>
+          <a:bodyPr wrap="square" lIns="0" tIns="0" rIns="0" bIns="0" rtlCol="0" anchor="t"/>
           <a:lstStyle/>
           <a:p>
             <a:pPr indent="0" marL="0">
@@ -9164,7 +9164,7 @@
           <a:ln/>
         </p:spPr>
         <p:txBody>
-          <a:bodyPr wrap="square" lIns="0" tIns="0" rIns="0" bIns="0" rtlCol="0" anchor="ctr"/>
+          <a:bodyPr wrap="square" lIns="0" tIns="0" rIns="0" bIns="0" rtlCol="0" anchor="t"/>
           <a:lstStyle/>
           <a:p>
             <a:pPr indent="0" marL="0">
@@ -9206,7 +9206,7 @@
           <a:ln/>
         </p:spPr>
         <p:txBody>
-          <a:bodyPr wrap="square" lIns="0" tIns="0" rIns="0" bIns="0" rtlCol="0" anchor="ctr"/>
+          <a:bodyPr wrap="square" lIns="0" tIns="0" rIns="0" bIns="0" rtlCol="0" anchor="t"/>
           <a:lstStyle/>
           <a:p>
             <a:pPr indent="0" marL="0">
@@ -9245,7 +9245,7 @@
           <a:ln/>
         </p:spPr>
         <p:txBody>
-          <a:bodyPr wrap="square" lIns="0" tIns="0" rIns="0" bIns="0" rtlCol="0" anchor="ctr"/>
+          <a:bodyPr wrap="square" lIns="0" tIns="0" rIns="0" bIns="0" rtlCol="0" anchor="t"/>
           <a:lstStyle/>
           <a:p>
             <a:pPr indent="0" marL="0">
@@ -9287,7 +9287,7 @@
           <a:ln/>
         </p:spPr>
         <p:txBody>
-          <a:bodyPr wrap="square" lIns="0" tIns="0" rIns="0" bIns="0" rtlCol="0" anchor="ctr"/>
+          <a:bodyPr wrap="square" lIns="0" tIns="0" rIns="0" bIns="0" rtlCol="0" anchor="t"/>
           <a:lstStyle/>
           <a:p>
             <a:pPr indent="0" marL="0">
@@ -9326,7 +9326,7 @@
           <a:ln/>
         </p:spPr>
         <p:txBody>
-          <a:bodyPr wrap="square" lIns="0" tIns="0" rIns="0" bIns="0" rtlCol="0" anchor="ctr"/>
+          <a:bodyPr wrap="square" lIns="0" tIns="0" rIns="0" bIns="0" rtlCol="0" anchor="t"/>
           <a:lstStyle/>
           <a:p>
             <a:pPr indent="0" marL="0">
@@ -9368,7 +9368,7 @@
           <a:ln/>
         </p:spPr>
         <p:txBody>
-          <a:bodyPr wrap="square" lIns="0" tIns="0" rIns="0" bIns="0" rtlCol="0" anchor="ctr"/>
+          <a:bodyPr wrap="square" lIns="0" tIns="0" rIns="0" bIns="0" rtlCol="0" anchor="t"/>
           <a:lstStyle/>
           <a:p>
             <a:pPr indent="0" marL="0">
@@ -9407,7 +9407,7 @@
           <a:ln/>
         </p:spPr>
         <p:txBody>
-          <a:bodyPr wrap="square" lIns="0" tIns="0" rIns="0" bIns="0" rtlCol="0" anchor="ctr"/>
+          <a:bodyPr wrap="square" lIns="0" tIns="0" rIns="0" bIns="0" rtlCol="0" anchor="t"/>
           <a:lstStyle/>
           <a:p>
             <a:pPr indent="0" marL="0">
@@ -9449,7 +9449,7 @@
           <a:ln/>
         </p:spPr>
         <p:txBody>
-          <a:bodyPr wrap="square" lIns="0" tIns="0" rIns="0" bIns="0" rtlCol="0" anchor="ctr"/>
+          <a:bodyPr wrap="square" lIns="0" tIns="0" rIns="0" bIns="0" rtlCol="0" anchor="t"/>
           <a:lstStyle/>
           <a:p>
             <a:pPr indent="0" marL="0">
@@ -9488,7 +9488,7 @@
           <a:ln/>
         </p:spPr>
         <p:txBody>
-          <a:bodyPr wrap="square" lIns="0" tIns="0" rIns="0" bIns="0" rtlCol="0" anchor="ctr"/>
+          <a:bodyPr wrap="square" lIns="0" tIns="0" rIns="0" bIns="0" rtlCol="0" anchor="t"/>
           <a:lstStyle/>
           <a:p>
             <a:pPr indent="0" marL="0">
@@ -9530,7 +9530,7 @@
           <a:ln/>
         </p:spPr>
         <p:txBody>
-          <a:bodyPr wrap="square" lIns="0" tIns="0" rIns="0" bIns="0" rtlCol="0" anchor="ctr"/>
+          <a:bodyPr wrap="square" lIns="0" tIns="0" rIns="0" bIns="0" rtlCol="0" anchor="t"/>
           <a:lstStyle/>
           <a:p>
             <a:pPr indent="0" marL="0">
@@ -9569,7 +9569,7 @@
           <a:ln/>
         </p:spPr>
         <p:txBody>
-          <a:bodyPr wrap="square" lIns="0" tIns="0" rIns="0" bIns="0" rtlCol="0" anchor="ctr"/>
+          <a:bodyPr wrap="square" lIns="0" tIns="0" rIns="0" bIns="0" rtlCol="0" anchor="t"/>
           <a:lstStyle/>
           <a:p>
             <a:pPr indent="0" marL="0">
@@ -9711,8 +9711,8 @@
         </p:nvSpPr>
         <p:spPr>
           <a:xfrm>
-            <a:off x="11140135" y="6291072"/>
-            <a:ext cx="457200" cy="274320"/>
+            <a:off x="11140135" y="6492240"/>
+            <a:ext cx="457200" cy="237744"/>
           </a:xfrm>
           <a:prstGeom prst="rect">
             <a:avLst/>
@@ -9826,7 +9826,7 @@
           <a:ln/>
         </p:spPr>
         <p:txBody>
-          <a:bodyPr wrap="square" lIns="0" tIns="0" rIns="0" bIns="0" rtlCol="0" anchor="ctr"/>
+          <a:bodyPr wrap="square" lIns="0" tIns="0" rIns="0" bIns="0" rtlCol="0" anchor="t"/>
           <a:lstStyle/>
           <a:p>
             <a:pPr indent="0" marL="0">
@@ -9919,7 +9919,7 @@
           <a:ln/>
         </p:spPr>
         <p:txBody>
-          <a:bodyPr wrap="square" lIns="0" tIns="0" rIns="0" bIns="0" rtlCol="0" anchor="ctr"/>
+          <a:bodyPr wrap="square" lIns="0" tIns="0" rIns="0" bIns="0" rtlCol="0" anchor="t"/>
           <a:lstStyle/>
           <a:p>
             <a:pPr indent="0" marL="0">
@@ -10181,8 +10181,8 @@
         </p:nvSpPr>
         <p:spPr>
           <a:xfrm>
-            <a:off x="11140135" y="6291072"/>
-            <a:ext cx="457200" cy="274320"/>
+            <a:off x="11140135" y="6492240"/>
+            <a:ext cx="457200" cy="237744"/>
           </a:xfrm>
           <a:prstGeom prst="rect">
             <a:avLst/>
@@ -10854,7 +10854,7 @@
           <a:ln/>
         </p:spPr>
         <p:txBody>
-          <a:bodyPr wrap="square" lIns="0" tIns="0" rIns="0" bIns="0" rtlCol="0" anchor="ctr"/>
+          <a:bodyPr wrap="square" lIns="0" tIns="0" rIns="0" bIns="0" rtlCol="0" anchor="t"/>
           <a:lstStyle/>
           <a:p>
             <a:pPr indent="0" marL="0">
@@ -11047,8 +11047,8 @@
         </p:nvSpPr>
         <p:spPr>
           <a:xfrm>
-            <a:off x="11140135" y="6291072"/>
-            <a:ext cx="457200" cy="274320"/>
+            <a:off x="11140135" y="6492240"/>
+            <a:ext cx="457200" cy="237744"/>
           </a:xfrm>
           <a:prstGeom prst="rect">
             <a:avLst/>
@@ -11764,7 +11764,7 @@
           <a:ln/>
         </p:spPr>
         <p:txBody>
-          <a:bodyPr wrap="square" lIns="0" tIns="0" rIns="0" bIns="0" rtlCol="0" anchor="ctr"/>
+          <a:bodyPr wrap="square" lIns="0" tIns="0" rIns="0" bIns="0" rtlCol="0" anchor="t"/>
           <a:lstStyle/>
           <a:p>
             <a:pPr indent="0" marL="0">
@@ -11903,8 +11903,8 @@
         </p:nvSpPr>
         <p:spPr>
           <a:xfrm>
-            <a:off x="11140135" y="6291072"/>
-            <a:ext cx="457200" cy="274320"/>
+            <a:off x="11140135" y="6492240"/>
+            <a:ext cx="457200" cy="237744"/>
           </a:xfrm>
           <a:prstGeom prst="rect">
             <a:avLst/>
@@ -12165,7 +12165,7 @@
           <a:ln/>
         </p:spPr>
         <p:txBody>
-          <a:bodyPr wrap="square" lIns="0" tIns="0" rIns="0" bIns="0" rtlCol="0" anchor="ctr"/>
+          <a:bodyPr wrap="square" lIns="0" tIns="0" rIns="0" bIns="0" rtlCol="0" anchor="t"/>
           <a:lstStyle/>
           <a:p>
             <a:pPr indent="0" marL="0">
@@ -12204,7 +12204,7 @@
           <a:ln/>
         </p:spPr>
         <p:txBody>
-          <a:bodyPr wrap="square" lIns="0" tIns="0" rIns="0" bIns="0" rtlCol="0" anchor="ctr"/>
+          <a:bodyPr wrap="square" lIns="0" tIns="0" rIns="0" bIns="0" rtlCol="0" anchor="t"/>
           <a:lstStyle/>
           <a:p>
             <a:pPr marL="342900" indent="-342900">
@@ -12833,8 +12833,8 @@
         </p:nvSpPr>
         <p:spPr>
           <a:xfrm>
-            <a:off x="11140135" y="6291072"/>
-            <a:ext cx="457200" cy="274320"/>
+            <a:off x="11140135" y="6492240"/>
+            <a:ext cx="457200" cy="237744"/>
           </a:xfrm>
           <a:prstGeom prst="rect">
             <a:avLst/>

--- a/slides/Chapter 01 - Introduction to Texas (Lecture Deck).pptx
+++ b/slides/Chapter 01 - Introduction to Texas (Lecture Deck).pptx
@@ -3403,7 +3403,7 @@
         </p:nvSpPr>
         <p:spPr>
           <a:xfrm>
-            <a:off x="594360" y="3081528"/>
+            <a:off x="594360" y="2953512"/>
             <a:ext cx="402336" cy="402336"/>
           </a:xfrm>
           <a:prstGeom prst="ellipse">
@@ -3423,7 +3423,7 @@
         </p:nvSpPr>
         <p:spPr>
           <a:xfrm>
-            <a:off x="594360" y="3081528"/>
+            <a:off x="594360" y="2953512"/>
             <a:ext cx="402336" cy="402336"/>
           </a:xfrm>
           <a:prstGeom prst="rect">
@@ -3462,7 +3462,7 @@
         </p:nvSpPr>
         <p:spPr>
           <a:xfrm>
-            <a:off x="1161288" y="3044952"/>
+            <a:off x="1161288" y="2916936"/>
             <a:ext cx="5943600" cy="310896"/>
           </a:xfrm>
           <a:prstGeom prst="rect">
@@ -3501,7 +3501,7 @@
         </p:nvSpPr>
         <p:spPr>
           <a:xfrm>
-            <a:off x="1161288" y="3374136"/>
+            <a:off x="1161288" y="3246120"/>
             <a:ext cx="5943600" cy="868680"/>
           </a:xfrm>
           <a:prstGeom prst="rect">
@@ -3543,7 +3543,7 @@
         </p:nvSpPr>
         <p:spPr>
           <a:xfrm>
-            <a:off x="594360" y="4379976"/>
+            <a:off x="594360" y="4123944"/>
             <a:ext cx="402336" cy="402336"/>
           </a:xfrm>
           <a:prstGeom prst="ellipse">
@@ -3563,7 +3563,7 @@
         </p:nvSpPr>
         <p:spPr>
           <a:xfrm>
-            <a:off x="594360" y="4379976"/>
+            <a:off x="594360" y="4123944"/>
             <a:ext cx="402336" cy="402336"/>
           </a:xfrm>
           <a:prstGeom prst="rect">
@@ -3602,7 +3602,7 @@
         </p:nvSpPr>
         <p:spPr>
           <a:xfrm>
-            <a:off x="1161288" y="4343400"/>
+            <a:off x="1161288" y="4087368"/>
             <a:ext cx="5943600" cy="310896"/>
           </a:xfrm>
           <a:prstGeom prst="rect">
@@ -3641,7 +3641,7 @@
         </p:nvSpPr>
         <p:spPr>
           <a:xfrm>
-            <a:off x="1161288" y="4672584"/>
+            <a:off x="1161288" y="4416552"/>
             <a:ext cx="5943600" cy="868680"/>
           </a:xfrm>
           <a:prstGeom prst="rect">
@@ -3683,12 +3683,12 @@
         </p:nvSpPr>
         <p:spPr>
           <a:xfrm>
-            <a:off x="594360" y="4709160"/>
-            <a:ext cx="11002975" cy="1143000"/>
+            <a:off x="594360" y="5394960"/>
+            <a:ext cx="11002975" cy="1051560"/>
           </a:xfrm>
           <a:prstGeom prst="roundRect">
             <a:avLst>
-              <a:gd name="adj" fmla="val 5600"/>
+              <a:gd name="adj" fmla="val 6087"/>
             </a:avLst>
           </a:prstGeom>
           <a:solidFill>
@@ -3710,7 +3710,7 @@
         </p:nvSpPr>
         <p:spPr>
           <a:xfrm>
-            <a:off x="868680" y="4873752"/>
+            <a:off x="868680" y="5559552"/>
             <a:ext cx="10454335" cy="329184"/>
           </a:xfrm>
           <a:prstGeom prst="rect">
@@ -3749,8 +3749,8 @@
         </p:nvSpPr>
         <p:spPr>
           <a:xfrm>
-            <a:off x="868680" y="5239512"/>
-            <a:ext cx="10454335" cy="429768"/>
+            <a:off x="868680" y="5925312"/>
+            <a:ext cx="10454335" cy="338328"/>
           </a:xfrm>
           <a:prstGeom prst="rect">
             <a:avLst/>
@@ -5130,11 +5130,11 @@
         <p:spPr>
           <a:xfrm>
             <a:off x="594360" y="1783080"/>
-            <a:ext cx="11002975" cy="1060704"/>
+            <a:ext cx="11002975" cy="914400"/>
           </a:xfrm>
           <a:prstGeom prst="roundRect">
             <a:avLst>
-              <a:gd name="adj" fmla="val 5172"/>
+              <a:gd name="adj" fmla="val 6000"/>
             </a:avLst>
           </a:prstGeom>
           <a:solidFill>
@@ -5156,7 +5156,7 @@
         </p:nvSpPr>
         <p:spPr>
           <a:xfrm>
-            <a:off x="795528" y="2084832"/>
+            <a:off x="795528" y="2011680"/>
             <a:ext cx="457200" cy="457200"/>
           </a:xfrm>
           <a:prstGeom prst="ellipse">
@@ -5176,7 +5176,7 @@
         </p:nvSpPr>
         <p:spPr>
           <a:xfrm>
-            <a:off x="795528" y="2084832"/>
+            <a:off x="795528" y="2011680"/>
             <a:ext cx="457200" cy="457200"/>
           </a:xfrm>
           <a:prstGeom prst="rect">
@@ -5255,7 +5255,7 @@
         <p:spPr>
           <a:xfrm>
             <a:off x="4050792" y="1929384"/>
-            <a:ext cx="7345375" cy="786384"/>
+            <a:ext cx="7345375" cy="640080"/>
           </a:xfrm>
           <a:prstGeom prst="rect">
             <a:avLst/>
@@ -5296,12 +5296,12 @@
         </p:nvSpPr>
         <p:spPr>
           <a:xfrm>
-            <a:off x="594360" y="2935224"/>
-            <a:ext cx="11002975" cy="1060704"/>
+            <a:off x="594360" y="2770632"/>
+            <a:ext cx="11002975" cy="914400"/>
           </a:xfrm>
           <a:prstGeom prst="roundRect">
             <a:avLst>
-              <a:gd name="adj" fmla="val 5172"/>
+              <a:gd name="adj" fmla="val 6000"/>
             </a:avLst>
           </a:prstGeom>
           <a:solidFill>
@@ -5323,7 +5323,7 @@
         </p:nvSpPr>
         <p:spPr>
           <a:xfrm>
-            <a:off x="795528" y="3236976"/>
+            <a:off x="795528" y="2999232"/>
             <a:ext cx="457200" cy="457200"/>
           </a:xfrm>
           <a:prstGeom prst="ellipse">
@@ -5343,7 +5343,7 @@
         </p:nvSpPr>
         <p:spPr>
           <a:xfrm>
-            <a:off x="795528" y="3236976"/>
+            <a:off x="795528" y="2999232"/>
             <a:ext cx="457200" cy="457200"/>
           </a:xfrm>
           <a:prstGeom prst="rect">
@@ -5382,7 +5382,7 @@
         </p:nvSpPr>
         <p:spPr>
           <a:xfrm>
-            <a:off x="1399032" y="3209544"/>
+            <a:off x="1399032" y="3044952"/>
             <a:ext cx="2468880" cy="365760"/>
           </a:xfrm>
           <a:prstGeom prst="rect">
@@ -5421,8 +5421,8 @@
         </p:nvSpPr>
         <p:spPr>
           <a:xfrm>
-            <a:off x="4050792" y="3081528"/>
-            <a:ext cx="7345375" cy="786384"/>
+            <a:off x="4050792" y="2916936"/>
+            <a:ext cx="7345375" cy="640080"/>
           </a:xfrm>
           <a:prstGeom prst="rect">
             <a:avLst/>
@@ -5463,12 +5463,12 @@
         </p:nvSpPr>
         <p:spPr>
           <a:xfrm>
-            <a:off x="594360" y="4087368"/>
-            <a:ext cx="11002975" cy="1060704"/>
+            <a:off x="594360" y="3758184"/>
+            <a:ext cx="11002975" cy="914400"/>
           </a:xfrm>
           <a:prstGeom prst="roundRect">
             <a:avLst>
-              <a:gd name="adj" fmla="val 5172"/>
+              <a:gd name="adj" fmla="val 6000"/>
             </a:avLst>
           </a:prstGeom>
           <a:solidFill>
@@ -5490,7 +5490,7 @@
         </p:nvSpPr>
         <p:spPr>
           <a:xfrm>
-            <a:off x="795528" y="4389120"/>
+            <a:off x="795528" y="3986784"/>
             <a:ext cx="457200" cy="457200"/>
           </a:xfrm>
           <a:prstGeom prst="ellipse">
@@ -5510,7 +5510,7 @@
         </p:nvSpPr>
         <p:spPr>
           <a:xfrm>
-            <a:off x="795528" y="4389120"/>
+            <a:off x="795528" y="3986784"/>
             <a:ext cx="457200" cy="457200"/>
           </a:xfrm>
           <a:prstGeom prst="rect">
@@ -5549,7 +5549,7 @@
         </p:nvSpPr>
         <p:spPr>
           <a:xfrm>
-            <a:off x="1399032" y="4361688"/>
+            <a:off x="1399032" y="4032504"/>
             <a:ext cx="2468880" cy="365760"/>
           </a:xfrm>
           <a:prstGeom prst="rect">
@@ -5588,8 +5588,8 @@
         </p:nvSpPr>
         <p:spPr>
           <a:xfrm>
-            <a:off x="4050792" y="4233672"/>
-            <a:ext cx="7345375" cy="786384"/>
+            <a:off x="4050792" y="3904488"/>
+            <a:ext cx="7345375" cy="640080"/>
           </a:xfrm>
           <a:prstGeom prst="rect">
             <a:avLst/>
@@ -5630,12 +5630,12 @@
         </p:nvSpPr>
         <p:spPr>
           <a:xfrm>
-            <a:off x="594360" y="5239512"/>
-            <a:ext cx="11002975" cy="1060704"/>
+            <a:off x="594360" y="4745736"/>
+            <a:ext cx="11002975" cy="914400"/>
           </a:xfrm>
           <a:prstGeom prst="roundRect">
             <a:avLst>
-              <a:gd name="adj" fmla="val 5172"/>
+              <a:gd name="adj" fmla="val 6000"/>
             </a:avLst>
           </a:prstGeom>
           <a:solidFill>
@@ -5657,7 +5657,7 @@
         </p:nvSpPr>
         <p:spPr>
           <a:xfrm>
-            <a:off x="795528" y="5541264"/>
+            <a:off x="795528" y="4974336"/>
             <a:ext cx="457200" cy="457200"/>
           </a:xfrm>
           <a:prstGeom prst="ellipse">
@@ -5677,7 +5677,7 @@
         </p:nvSpPr>
         <p:spPr>
           <a:xfrm>
-            <a:off x="795528" y="5541264"/>
+            <a:off x="795528" y="4974336"/>
             <a:ext cx="457200" cy="457200"/>
           </a:xfrm>
           <a:prstGeom prst="rect">
@@ -5716,7 +5716,7 @@
         </p:nvSpPr>
         <p:spPr>
           <a:xfrm>
-            <a:off x="1399032" y="5513832"/>
+            <a:off x="1399032" y="5020056"/>
             <a:ext cx="2468880" cy="365760"/>
           </a:xfrm>
           <a:prstGeom prst="rect">
@@ -5755,8 +5755,8 @@
         </p:nvSpPr>
         <p:spPr>
           <a:xfrm>
-            <a:off x="4050792" y="5385816"/>
-            <a:ext cx="7345375" cy="786384"/>
+            <a:off x="4050792" y="4892040"/>
+            <a:ext cx="7345375" cy="640080"/>
           </a:xfrm>
           <a:prstGeom prst="rect">
             <a:avLst/>
@@ -5797,8 +5797,8 @@
         </p:nvSpPr>
         <p:spPr>
           <a:xfrm>
-            <a:off x="594360" y="5989320"/>
-            <a:ext cx="11002975" cy="365760"/>
+            <a:off x="594360" y="5897880"/>
+            <a:ext cx="11002975" cy="384048"/>
           </a:xfrm>
           <a:prstGeom prst="rect">
             <a:avLst/>
@@ -11087,11 +11087,11 @@
         <p:spPr>
           <a:xfrm>
             <a:off x="594360" y="1783080"/>
-            <a:ext cx="11002975" cy="1060704"/>
+            <a:ext cx="11002975" cy="914400"/>
           </a:xfrm>
           <a:prstGeom prst="roundRect">
             <a:avLst>
-              <a:gd name="adj" fmla="val 5172"/>
+              <a:gd name="adj" fmla="val 6000"/>
             </a:avLst>
           </a:prstGeom>
           <a:solidFill>
@@ -11113,7 +11113,7 @@
         </p:nvSpPr>
         <p:spPr>
           <a:xfrm>
-            <a:off x="795528" y="2084832"/>
+            <a:off x="795528" y="2011680"/>
             <a:ext cx="457200" cy="457200"/>
           </a:xfrm>
           <a:prstGeom prst="ellipse">
@@ -11133,7 +11133,7 @@
         </p:nvSpPr>
         <p:spPr>
           <a:xfrm>
-            <a:off x="795528" y="2084832"/>
+            <a:off x="795528" y="2011680"/>
             <a:ext cx="457200" cy="457200"/>
           </a:xfrm>
           <a:prstGeom prst="rect">
@@ -11212,7 +11212,7 @@
         <p:spPr>
           <a:xfrm>
             <a:off x="3319272" y="1929384"/>
-            <a:ext cx="8076895" cy="786384"/>
+            <a:ext cx="8076895" cy="640080"/>
           </a:xfrm>
           <a:prstGeom prst="rect">
             <a:avLst/>
@@ -11253,12 +11253,12 @@
         </p:nvSpPr>
         <p:spPr>
           <a:xfrm>
-            <a:off x="594360" y="2935224"/>
-            <a:ext cx="11002975" cy="1060704"/>
+            <a:off x="594360" y="2770632"/>
+            <a:ext cx="11002975" cy="914400"/>
           </a:xfrm>
           <a:prstGeom prst="roundRect">
             <a:avLst>
-              <a:gd name="adj" fmla="val 5172"/>
+              <a:gd name="adj" fmla="val 6000"/>
             </a:avLst>
           </a:prstGeom>
           <a:solidFill>
@@ -11280,7 +11280,7 @@
         </p:nvSpPr>
         <p:spPr>
           <a:xfrm>
-            <a:off x="795528" y="3236976"/>
+            <a:off x="795528" y="2999232"/>
             <a:ext cx="457200" cy="457200"/>
           </a:xfrm>
           <a:prstGeom prst="ellipse">
@@ -11300,7 +11300,7 @@
         </p:nvSpPr>
         <p:spPr>
           <a:xfrm>
-            <a:off x="795528" y="3236976"/>
+            <a:off x="795528" y="2999232"/>
             <a:ext cx="457200" cy="457200"/>
           </a:xfrm>
           <a:prstGeom prst="rect">
@@ -11339,7 +11339,7 @@
         </p:nvSpPr>
         <p:spPr>
           <a:xfrm>
-            <a:off x="1399032" y="3209544"/>
+            <a:off x="1399032" y="3044952"/>
             <a:ext cx="1737360" cy="365760"/>
           </a:xfrm>
           <a:prstGeom prst="rect">
@@ -11378,8 +11378,8 @@
         </p:nvSpPr>
         <p:spPr>
           <a:xfrm>
-            <a:off x="3319272" y="3081528"/>
-            <a:ext cx="8076895" cy="786384"/>
+            <a:off x="3319272" y="2916936"/>
+            <a:ext cx="8076895" cy="640080"/>
           </a:xfrm>
           <a:prstGeom prst="rect">
             <a:avLst/>
@@ -11420,12 +11420,12 @@
         </p:nvSpPr>
         <p:spPr>
           <a:xfrm>
-            <a:off x="594360" y="4087368"/>
-            <a:ext cx="11002975" cy="1060704"/>
+            <a:off x="594360" y="3758184"/>
+            <a:ext cx="11002975" cy="914400"/>
           </a:xfrm>
           <a:prstGeom prst="roundRect">
             <a:avLst>
-              <a:gd name="adj" fmla="val 5172"/>
+              <a:gd name="adj" fmla="val 6000"/>
             </a:avLst>
           </a:prstGeom>
           <a:solidFill>
@@ -11447,7 +11447,7 @@
         </p:nvSpPr>
         <p:spPr>
           <a:xfrm>
-            <a:off x="795528" y="4389120"/>
+            <a:off x="795528" y="3986784"/>
             <a:ext cx="457200" cy="457200"/>
           </a:xfrm>
           <a:prstGeom prst="ellipse">
@@ -11467,7 +11467,7 @@
         </p:nvSpPr>
         <p:spPr>
           <a:xfrm>
-            <a:off x="795528" y="4389120"/>
+            <a:off x="795528" y="3986784"/>
             <a:ext cx="457200" cy="457200"/>
           </a:xfrm>
           <a:prstGeom prst="rect">
@@ -11506,7 +11506,7 @@
         </p:nvSpPr>
         <p:spPr>
           <a:xfrm>
-            <a:off x="1399032" y="4361688"/>
+            <a:off x="1399032" y="4032504"/>
             <a:ext cx="1737360" cy="365760"/>
           </a:xfrm>
           <a:prstGeom prst="rect">
@@ -11545,8 +11545,8 @@
         </p:nvSpPr>
         <p:spPr>
           <a:xfrm>
-            <a:off x="3319272" y="4233672"/>
-            <a:ext cx="8076895" cy="786384"/>
+            <a:off x="3319272" y="3904488"/>
+            <a:ext cx="8076895" cy="640080"/>
           </a:xfrm>
           <a:prstGeom prst="rect">
             <a:avLst/>
@@ -11587,12 +11587,12 @@
         </p:nvSpPr>
         <p:spPr>
           <a:xfrm>
-            <a:off x="594360" y="5239512"/>
-            <a:ext cx="11002975" cy="1060704"/>
+            <a:off x="594360" y="4745736"/>
+            <a:ext cx="11002975" cy="914400"/>
           </a:xfrm>
           <a:prstGeom prst="roundRect">
             <a:avLst>
-              <a:gd name="adj" fmla="val 5172"/>
+              <a:gd name="adj" fmla="val 6000"/>
             </a:avLst>
           </a:prstGeom>
           <a:solidFill>
@@ -11614,7 +11614,7 @@
         </p:nvSpPr>
         <p:spPr>
           <a:xfrm>
-            <a:off x="795528" y="5541264"/>
+            <a:off x="795528" y="4974336"/>
             <a:ext cx="457200" cy="457200"/>
           </a:xfrm>
           <a:prstGeom prst="ellipse">
@@ -11634,7 +11634,7 @@
         </p:nvSpPr>
         <p:spPr>
           <a:xfrm>
-            <a:off x="795528" y="5541264"/>
+            <a:off x="795528" y="4974336"/>
             <a:ext cx="457200" cy="457200"/>
           </a:xfrm>
           <a:prstGeom prst="rect">
@@ -11673,7 +11673,7 @@
         </p:nvSpPr>
         <p:spPr>
           <a:xfrm>
-            <a:off x="1399032" y="5513832"/>
+            <a:off x="1399032" y="5020056"/>
             <a:ext cx="1737360" cy="365760"/>
           </a:xfrm>
           <a:prstGeom prst="rect">
@@ -11712,8 +11712,8 @@
         </p:nvSpPr>
         <p:spPr>
           <a:xfrm>
-            <a:off x="3319272" y="5385816"/>
-            <a:ext cx="8076895" cy="786384"/>
+            <a:off x="3319272" y="4892040"/>
+            <a:ext cx="8076895" cy="640080"/>
           </a:xfrm>
           <a:prstGeom prst="rect">
             <a:avLst/>
@@ -11754,8 +11754,8 @@
         </p:nvSpPr>
         <p:spPr>
           <a:xfrm>
-            <a:off x="594360" y="5989320"/>
-            <a:ext cx="11002975" cy="365760"/>
+            <a:off x="594360" y="5897880"/>
+            <a:ext cx="11002975" cy="384048"/>
           </a:xfrm>
           <a:prstGeom prst="rect">
             <a:avLst/>
@@ -12055,7 +12055,7 @@
         <p:spPr>
           <a:xfrm>
             <a:off x="850392" y="2606040"/>
-            <a:ext cx="5248656" cy="1051560"/>
+            <a:ext cx="5248656" cy="576072"/>
           </a:xfrm>
           <a:prstGeom prst="rect">
             <a:avLst/>

--- a/slides/Chapter 01 - Introduction to Texas (Lecture Deck).pptx
+++ b/slides/Chapter 01 - Introduction to Texas (Lecture Deck).pptx
@@ -1604,8 +1604,8 @@
 amusement park. It is the reverse. The park opened in 1961 and took the existing
 slogan, which refers to the six sovereign governments.
 The French claim is thin and worth saying so. La Salle's colony lasted about
-five years, was a disaster, and ended in mutiny and disease. It is included by
-tradition more than by significance.
+four years, was a disaster, and ended in mutiny, disease, and a Karankawa
+attack. It is included by tradition more than by significance.
 COLD CALL: "Which of these six governments still shapes Texas law today?" Push
 toward Spain and Mexico, which students rarely name.</a:t>
             </a:r>
@@ -3389,7 +3389,7 @@
                 <a:ea typeface="Calibri" pitchFamily="34" charset="-122"/>
                 <a:cs typeface="Calibri" pitchFamily="34" charset="-120"/>
               </a:rPr>
-              <a:t>Roughly 31.3 million people as of 2024, up from 29.1 million in 2020. Frequently the largest numeric gain of any state.</a:t>
+              <a:t>Roughly 31.7 million people as of July 2025, up from 29.1 million in 2020. Texas added about 391,000 residents in a single year, the largest numeric gain of any state.</a:t>
             </a:r>
             <a:endParaRPr lang="en-US" sz="1250" dirty="0"/>
           </a:p>
@@ -3529,7 +3529,7 @@
                 <a:ea typeface="Calibri" pitchFamily="34" charset="-122"/>
                 <a:cs typeface="Calibri" pitchFamily="34" charset="-120"/>
               </a:rPr>
-              <a:t>Four of the fifteen largest cities in the United States are in Texas. Growth is concentrated in Houston, Dallas-Fort Worth, San Antonio, and Austin.</a:t>
+              <a:t>Five of the fifteen largest cities in the United States are in Texas, and four of the top ten. Growth is concentrated in Houston, Dallas-Fort Worth, San Antonio, and Austin.</a:t>
             </a:r>
             <a:endParaRPr lang="en-US" sz="1250" dirty="0"/>
           </a:p>
@@ -3669,7 +3669,7 @@
                 <a:ea typeface="Calibri" pitchFamily="34" charset="-122"/>
                 <a:cs typeface="Calibri" pitchFamily="34" charset="-120"/>
               </a:rPr>
-              <a:t>Texas lost its white majority in 2004. Since about 2022, Hispanic Texans have been the largest group, roughly 40 percent, about even with non-Hispanic white Texans.</a:t>
+              <a:t>Texas lost its white majority in 2004. Since 2022, Hispanic Texans have been the largest group: about 41 percent in 2025, compared with about 37 percent non-Hispanic white.</a:t>
             </a:r>
             <a:endParaRPr lang="en-US" sz="1250" dirty="0"/>
           </a:p>
@@ -5449,7 +5449,7 @@
                 <a:ea typeface="Calibri" pitchFamily="34" charset="-122"/>
                 <a:cs typeface="Calibri" pitchFamily="34" charset="-120"/>
               </a:rPr>
-              <a:t>The same reaction limited the Legislature to a short biennial session. Chapter 4.</a:t>
+              <a:t>The same reaction limited the Legislature to a biennial session; the 140-day cap was added by amendment in 1960. Chapter 4.</a:t>
             </a:r>
             <a:endParaRPr lang="en-US" sz="1250" dirty="0"/>
           </a:p>
@@ -11531,7 +11531,7 @@
                 <a:ea typeface="Calibri" pitchFamily="34" charset="-122"/>
                 <a:cs typeface="Calibri" pitchFamily="34" charset="-120"/>
               </a:rPr>
-              <a:t>1866 to 1869</a:t>
+              <a:t>1861 to 1869</a:t>
             </a:r>
             <a:endParaRPr lang="en-US" sz="1400" dirty="0"/>
           </a:p>
@@ -11573,7 +11573,7 @@
                 <a:ea typeface="Calibri" pitchFamily="34" charset="-122"/>
                 <a:cs typeface="Calibri" pitchFamily="34" charset="-120"/>
               </a:rPr>
-              <a:t>Three constitutions in four years as Texas is rewritten first by former Confederates, then under congressional Reconstruction.</a:t>
+              <a:t>Three constitutions in eight years as Texas is rewritten first for the Confederacy, then by former Confederates under Presidential Reconstruction, then under congressional Reconstruction.</a:t>
             </a:r>
             <a:endParaRPr lang="en-US" sz="1250" dirty="0"/>
           </a:p>
@@ -12406,7 +12406,7 @@
                 <a:ea typeface="Calibri" pitchFamily="34" charset="-122"/>
                 <a:cs typeface="Calibri" pitchFamily="34" charset="-120"/>
               </a:rPr>
-              <a:t>When Democrats regained control, they wrote a constitution designed to make another Davis impossible: a weak governor, a plural executive of separately elected officials, a legislature meeting only 140 days every two years, elected judges, and a long document requiring voter approval to change. Texas still governs itself inside that reaction today.</a:t>
+              <a:t>When Democrats regained control, they wrote a constitution designed to make another Davis impossible: a weak governor, a plural executive of separately elected officials, a legislature meeting only once every two years (today capped at 140 days), elected judges, and a long document requiring voter approval to change. Texas still governs itself inside that reaction today.</a:t>
             </a:r>
             <a:endParaRPr lang="en-US" sz="1250" dirty="0"/>
           </a:p>
